--- a/presentation/Smart_Guided_Troubleshooting_Engine.pptx
+++ b/presentation/Smart_Guided_Troubleshooting_Engine.pptx
@@ -494,25 +494,25 @@
                 <c:formatCode>General</c:formatCode>
                 <c:ptCount val="7"/>
                 <c:pt idx="0">
-                  <c:v>3.33</c:v>
+                  <c:v>2.52</c:v>
                 </c:pt>
                 <c:pt idx="1">
+                  <c:v>2.78</c:v>
+                </c:pt>
+                <c:pt idx="2">
+                  <c:v>2.57</c:v>
+                </c:pt>
+                <c:pt idx="3">
+                  <c:v>3.09</c:v>
+                </c:pt>
+                <c:pt idx="4">
+                  <c:v>3.85</c:v>
+                </c:pt>
+                <c:pt idx="5">
                   <c:v>3.8</c:v>
                 </c:pt>
-                <c:pt idx="2">
-                  <c:v>3.63</c:v>
-                </c:pt>
-                <c:pt idx="3">
-                  <c:v>4.28</c:v>
-                </c:pt>
-                <c:pt idx="4">
-                  <c:v>4.72</c:v>
-                </c:pt>
-                <c:pt idx="5">
-                  <c:v>4.87</c:v>
-                </c:pt>
                 <c:pt idx="6">
-                  <c:v>7.09</c:v>
+                  <c:v>5.62</c:v>
                 </c:pt>
               </c:numCache>
             </c:numRef>
@@ -601,25 +601,25 @@
                 <c:formatCode>General</c:formatCode>
                 <c:ptCount val="7"/>
                 <c:pt idx="0">
-                  <c:v>5.47</c:v>
+                  <c:v>4.32</c:v>
                 </c:pt>
                 <c:pt idx="1">
-                  <c:v>6.28</c:v>
+                  <c:v>4.69</c:v>
                 </c:pt>
                 <c:pt idx="2">
-                  <c:v>4.77</c:v>
+                  <c:v>3.39</c:v>
                 </c:pt>
                 <c:pt idx="3">
-                  <c:v>6.13</c:v>
+                  <c:v>4.19</c:v>
                 </c:pt>
                 <c:pt idx="4">
-                  <c:v>8.17</c:v>
+                  <c:v>6.93</c:v>
                 </c:pt>
                 <c:pt idx="5">
-                  <c:v>6.51</c:v>
+                  <c:v>5.38</c:v>
                 </c:pt>
                 <c:pt idx="6">
-                  <c:v>10.11</c:v>
+                  <c:v>8.24</c:v>
                 </c:pt>
               </c:numCache>
             </c:numRef>
@@ -700,7 +700,7 @@
         <c:axId val="2094734552"/>
         <c:scaling>
           <c:orientation val="minMax"/>
-          <c:max val="11"/>
+          <c:max val="9"/>
           <c:min val="0"/>
         </c:scaling>
         <c:delete val="0"/>
@@ -1182,7 +1182,7 @@
           <a:p>
             <a:r>
               <a:rPr lang="en-US" dirty="0"/>
-              <a:t>Galaxy users describe problems vaguely. This engine turns such a complaint into a schema-valid troubleshooting plan whose settings steps open the right Settings screen in one tap. Headline numbers: 28.6 ms P95 on a cache hit, 5.2 s P95 for a live plan from a local 1.5B model, zero URL leaks, and no per-query cost.</a:t>
+              <a:t>Galaxy users describe problems vaguely. This engine turns such a complaint into a schema-valid troubleshooting plan whose settings steps open the right Settings screen in one tap. Headline numbers: 13.7 ms P95 on a cache hit, 4.4 s P95 for a live plan from a local 1.5B model, zero URL leaks, and no per-query cost.</a:t>
             </a:r>
             <a:endParaRPr lang="en-US" dirty="0"/>
           </a:p>
@@ -1886,7 +1886,7 @@
           <a:p>
             <a:r>
               <a:rPr lang="en-US" dirty="0"/>
-              <a:t>The live path runs qwen2.5:1.5b through Ollama on an RTX 4050 laptop GPU. The model output is constrained by a JSON schema and contains only indices and screen descriptions. Retrieval, ordering and validation are deterministic. 33 of 33 live plans passed every gate; median 3.2 s, P95 5.2 s.</a:t>
+              <a:t>The live path runs qwen2.5:1.5b through Ollama on an RTX 4050 laptop GPU. The model output is constrained by a JSON schema and contains only indices and screen descriptions. Retrieval, ordering and validation are deterministic. 33 of 33 live plans passed every gate; median 2.6 s, P95 4.4 s.</a:t>
             </a:r>
             <a:endParaRPr lang="en-US" dirty="0"/>
           </a:p>
@@ -2062,7 +2062,7 @@
           <a:p>
             <a:r>
               <a:rPr lang="en-US" dirty="0"/>
-              <a:t>All seven models ran on the same inputs in one run. The 4-bit llama3.2 1B has the lowest P95 but a slower median because it writes 37% more tokens, and its plans needed most action names replaced. qwen2.5:1.5b gives the best balance of speed, validity and accuracy.</a:t>
+              <a:t>All seven models ran on the same inputs in one run. The 4-bit llama3.2 1B ties at the median and has the lowest P95, but its plans needed most action names replaced and it writes 37% more tokens. qwen2.5:1.5b gives the best balance of speed, validity and accuracy.</a:t>
             </a:r>
             <a:endParaRPr lang="en-US" dirty="0"/>
           </a:p>
@@ -2700,7 +2700,7 @@
                 <a:ea typeface="Arial" pitchFamily="34" charset="-122"/>
                 <a:cs typeface="Arial" pitchFamily="34" charset="-120"/>
               </a:rPr>
-              <a:t>28.6 ms</a:t>
+              <a:t>13.7 ms</a:t>
             </a:r>
             <a:endParaRPr lang="en-US" sz="2200" dirty="0"/>
           </a:p>
@@ -2805,7 +2805,7 @@
                 <a:ea typeface="Arial" pitchFamily="34" charset="-122"/>
                 <a:cs typeface="Arial" pitchFamily="34" charset="-120"/>
               </a:rPr>
-              <a:t>5.2 s</a:t>
+              <a:t>4.4 s</a:t>
             </a:r>
             <a:endParaRPr lang="en-US" sz="2200" dirty="0"/>
           </a:p>
@@ -7717,7 +7717,7 @@
                 <a:ea typeface="Arial" pitchFamily="34" charset="-122"/>
                 <a:cs typeface="Arial" pitchFamily="34" charset="-120"/>
               </a:rPr>
-              <a:t>28.6 ms</a:t>
+              <a:t>13.7 ms</a:t>
             </a:r>
             <a:endParaRPr lang="en-US" sz="3000" dirty="0"/>
           </a:p>
@@ -7756,7 +7756,7 @@
                 <a:ea typeface="Calibri" pitchFamily="34" charset="-122"/>
                 <a:cs typeface="Calibri" pitchFamily="34" charset="-120"/>
               </a:rPr>
-              <a:t>P95 for a phrasing never seen before (0.3 ms exact)</a:t>
+              <a:t>P95 for a phrasing never seen before (0.1 ms exact)</a:t>
             </a:r>
             <a:endParaRPr lang="en-US" sz="1200" dirty="0"/>
           </a:p>
@@ -8872,7 +8872,7 @@
                 <a:ea typeface="Arial" pitchFamily="34" charset="-122"/>
                 <a:cs typeface="Arial" pitchFamily="34" charset="-120"/>
               </a:rPr>
-              <a:t>3.2 s</a:t>
+              <a:t>2.6 s</a:t>
             </a:r>
             <a:endParaRPr lang="en-US" sz="3000" dirty="0"/>
           </a:p>
@@ -8977,7 +8977,7 @@
                 <a:ea typeface="Arial" pitchFamily="34" charset="-122"/>
                 <a:cs typeface="Arial" pitchFamily="34" charset="-120"/>
               </a:rPr>
-              <a:t>5.2 s</a:t>
+              <a:t>4.4 s</a:t>
             </a:r>
             <a:endParaRPr lang="en-US" sz="3000" dirty="0"/>
           </a:p>
@@ -9494,7 +9494,7 @@
                 <a:ea typeface="Calibri" pitchFamily="34" charset="-122"/>
                 <a:cs typeface="Calibri" pitchFamily="34" charset="-120"/>
               </a:rPr>
-              <a:t>Hybrid takes 24.5 ms per screen (P95), against 428 ms for a model call.</a:t>
+              <a:t>Hybrid takes 16.9 ms per screen (P95), against 279 ms for a model call.</a:t>
             </a:r>
             <a:endParaRPr lang="en-US" sz="1300" dirty="0"/>
           </a:p>
@@ -9701,7 +9701,7 @@
                 <a:ea typeface="Calibri" pitchFamily="34" charset="-122"/>
                 <a:cs typeface="Calibri" pitchFamily="34" charset="-120"/>
               </a:rPr>
-              <a:t>Latency moves 5–10% between runs; the dedicated benchmark measured qwen2.5:1.5b at 5.2 s P95.</a:t>
+              <a:t>Latency moves 5–10% between runs; the dedicated benchmark measured qwen2.5:1.5b at 4.4 s P95.</a:t>
             </a:r>
             <a:endParaRPr lang="en-US" sz="1000" dirty="0"/>
           </a:p>
@@ -9783,7 +9783,7 @@
                 <a:ea typeface="Calibri" pitchFamily="34" charset="-122"/>
                 <a:cs typeface="Calibri" pitchFamily="34" charset="-120"/>
               </a:rPr>
-              <a:t>Fastest median of all seven.</a:t>
+              <a:t>Fastest median, narrowly: the 4-bit llama3.2 1B is within 2%.</a:t>
             </a:r>
             <a:endParaRPr lang="en-US" sz="1200" dirty="0"/>
           </a:p>
@@ -9846,7 +9846,7 @@
                 <a:ea typeface="Calibri" pitchFamily="34" charset="-122"/>
                 <a:cs typeface="Calibri" pitchFamily="34" charset="-120"/>
               </a:rPr>
-              <a:t>The 3B models link more screens but cost 1.4–1.5 s more at the median.</a:t>
+              <a:t>The 3B models link more screens but cost about 1.3 s more at the median.</a:t>
             </a:r>
             <a:endParaRPr lang="en-US" sz="1200" dirty="0"/>
           </a:p>
@@ -9867,7 +9867,7 @@
                 <a:ea typeface="Calibri" pitchFamily="34" charset="-122"/>
                 <a:cs typeface="Calibri" pitchFamily="34" charset="-120"/>
               </a:rPr>
-              <a:t>A 1B model is not enough: the 4-bit llama3.2 1B had 63 of 72 action names replaced.</a:t>
+              <a:t>The 4-bit llama3.2 1B is as fast (lowest P95) but loses on quality: 63 of 72 action names replaced, step accuracy 2.87.</a:t>
             </a:r>
             <a:endParaRPr lang="en-US" sz="1200" dirty="0"/>
           </a:p>
@@ -10370,7 +10370,7 @@
                           <a:ea typeface="Calibri" pitchFamily="34" charset="-122"/>
                           <a:cs typeface="Calibri" pitchFamily="34" charset="-120"/>
                         </a:rPr>
-                        <a:t>0.3 ms exact · 28.6 ms new phrasing</a:t>
+                        <a:t>0.1 ms exact · 13.7 ms new phrasing</a:t>
                       </a:r>
                       <a:endParaRPr lang="en-US" sz="1200" dirty="0">
                         <a:latin typeface="Calibri" charset="0"/>
@@ -10576,7 +10576,7 @@
                           <a:ea typeface="Calibri" pitchFamily="34" charset="-122"/>
                           <a:cs typeface="Calibri" pitchFamily="34" charset="-120"/>
                         </a:rPr>
-                        <a:t>5.2 s</a:t>
+                        <a:t>4.4 s (median 2.6 s)</a:t>
                       </a:r>
                       <a:endParaRPr lang="en-US" sz="1200" dirty="0">
                         <a:latin typeface="Calibri" charset="0"/>
@@ -12107,7 +12107,7 @@
                 <a:ea typeface="Calibri" pitchFamily="34" charset="-122"/>
                 <a:cs typeface="Calibri" pitchFamily="34" charset="-120"/>
               </a:rPr>
-              <a:t>Measured on one laptop (i5-13420H, RTX 4050 6 GB); latency varies 5–10% between runs.</a:t>
+              <a:t>Measured on one laptop (i5-13420H, RTX 4050 6 GB) with nothing else running.</a:t>
             </a:r>
             <a:endParaRPr lang="en-US" sz="1100" dirty="0"/>
           </a:p>
